--- a/преза ВКР.pptx
+++ b/преза ВКР.pptx
@@ -5,7 +5,7 @@
     <p:sldMasterId id="2147483648" r:id="rId1"/>
   </p:sldMasterIdLst>
   <p:notesMasterIdLst>
-    <p:notesMasterId r:id="rId20"/>
+    <p:notesMasterId r:id="rId22"/>
   </p:notesMasterIdLst>
   <p:sldIdLst>
     <p:sldId id="256" r:id="rId2"/>
@@ -20,25 +20,27 @@
     <p:sldId id="264" r:id="rId11"/>
     <p:sldId id="265" r:id="rId12"/>
     <p:sldId id="266" r:id="rId13"/>
-    <p:sldId id="267" r:id="rId14"/>
-    <p:sldId id="268" r:id="rId15"/>
-    <p:sldId id="269" r:id="rId16"/>
-    <p:sldId id="270" r:id="rId17"/>
-    <p:sldId id="271" r:id="rId18"/>
-    <p:sldId id="272" r:id="rId19"/>
+    <p:sldId id="275" r:id="rId14"/>
+    <p:sldId id="276" r:id="rId15"/>
+    <p:sldId id="267" r:id="rId16"/>
+    <p:sldId id="268" r:id="rId17"/>
+    <p:sldId id="269" r:id="rId18"/>
+    <p:sldId id="270" r:id="rId19"/>
+    <p:sldId id="271" r:id="rId20"/>
+    <p:sldId id="272" r:id="rId21"/>
   </p:sldIdLst>
   <p:sldSz cx="16256000" cy="9144000"/>
   <p:notesSz cx="9144000" cy="16256000"/>
   <p:embeddedFontLst>
     <p:embeddedFont>
       <p:font typeface="微软雅黑" panose="020B0503020204020204" pitchFamily="34" charset="-122"/>
-      <p:regular r:id="rId21"/>
-      <p:bold r:id="rId22"/>
+      <p:regular r:id="rId23"/>
+      <p:bold r:id="rId24"/>
     </p:embeddedFont>
     <p:embeddedFont>
       <p:font typeface="Quattrocento Sans" panose="020B0502050000020003" pitchFamily="34" charset="0"/>
-      <p:regular r:id="rId23"/>
-      <p:bold r:id="rId24"/>
+      <p:regular r:id="rId25"/>
+      <p:bold r:id="rId26"/>
     </p:embeddedFont>
   </p:embeddedFontLst>
   <p:defaultTextStyle>
@@ -610,7 +612,13 @@
   <p:cSld>
     <p:spTree>
       <p:nvGrpSpPr>
-        <p:cNvPr id="1" name=""/>
+        <p:cNvPr id="1" name="">
+          <a:extLst>
+            <a:ext uri="{FF2B5EF4-FFF2-40B4-BE49-F238E27FC236}">
+              <a16:creationId xmlns:a16="http://schemas.microsoft.com/office/drawing/2014/main" id="{8780A26B-8499-C9D8-DB39-1E98021C9BD1}"/>
+            </a:ext>
+          </a:extLst>
+        </p:cNvPr>
         <p:cNvGrpSpPr/>
         <p:nvPr/>
       </p:nvGrpSpPr>
@@ -624,7 +632,13 @@
       </p:grpSpPr>
       <p:sp>
         <p:nvSpPr>
-          <p:cNvPr id="2" name="Slide Image Placeholder 1"/>
+          <p:cNvPr id="2" name="Slide Image Placeholder 1">
+            <a:extLst>
+              <a:ext uri="{FF2B5EF4-FFF2-40B4-BE49-F238E27FC236}">
+                <a16:creationId xmlns:a16="http://schemas.microsoft.com/office/drawing/2014/main" id="{A269D194-95DA-DBAC-CFFE-27ECA8F1D0E6}"/>
+              </a:ext>
+            </a:extLst>
+          </p:cNvPr>
           <p:cNvSpPr>
             <a:spLocks noGrp="1" noRot="1" noChangeAspect="1"/>
           </p:cNvSpPr>
@@ -636,7 +650,13 @@
       </p:sp>
       <p:sp>
         <p:nvSpPr>
-          <p:cNvPr id="3" name="Notes Placeholder 2"/>
+          <p:cNvPr id="3" name="Notes Placeholder 2">
+            <a:extLst>
+              <a:ext uri="{FF2B5EF4-FFF2-40B4-BE49-F238E27FC236}">
+                <a16:creationId xmlns:a16="http://schemas.microsoft.com/office/drawing/2014/main" id="{D611F2E8-17B7-812D-8D09-66F6185FEF08}"/>
+              </a:ext>
+            </a:extLst>
+          </p:cNvPr>
           <p:cNvSpPr>
             <a:spLocks noGrp="1"/>
           </p:cNvSpPr>
@@ -655,7 +675,13 @@
       </p:sp>
       <p:sp>
         <p:nvSpPr>
-          <p:cNvPr id="4" name="Slide Number Placeholder 3"/>
+          <p:cNvPr id="4" name="Slide Number Placeholder 3">
+            <a:extLst>
+              <a:ext uri="{FF2B5EF4-FFF2-40B4-BE49-F238E27FC236}">
+                <a16:creationId xmlns:a16="http://schemas.microsoft.com/office/drawing/2014/main" id="{BBC3C55C-B38E-7B3B-4157-5C532236349B}"/>
+              </a:ext>
+            </a:extLst>
+          </p:cNvPr>
           <p:cNvSpPr>
             <a:spLocks noGrp="1"/>
           </p:cNvSpPr>
@@ -679,7 +705,7 @@
     </p:spTree>
     <p:extLst>
       <p:ext uri="{BB962C8B-B14F-4D97-AF65-F5344CB8AC3E}">
-        <p14:creationId xmlns:p14="http://schemas.microsoft.com/office/powerpoint/2010/main" val="1024086991"/>
+        <p14:creationId xmlns:p14="http://schemas.microsoft.com/office/powerpoint/2010/main" val="4188300446"/>
       </p:ext>
     </p:extLst>
   </p:cSld>
@@ -694,7 +720,13 @@
   <p:cSld>
     <p:spTree>
       <p:nvGrpSpPr>
-        <p:cNvPr id="1" name=""/>
+        <p:cNvPr id="1" name="">
+          <a:extLst>
+            <a:ext uri="{FF2B5EF4-FFF2-40B4-BE49-F238E27FC236}">
+              <a16:creationId xmlns:a16="http://schemas.microsoft.com/office/drawing/2014/main" id="{3C2765E7-01DF-3AEF-8B31-679FEE264083}"/>
+            </a:ext>
+          </a:extLst>
+        </p:cNvPr>
         <p:cNvGrpSpPr/>
         <p:nvPr/>
       </p:nvGrpSpPr>
@@ -708,7 +740,13 @@
       </p:grpSpPr>
       <p:sp>
         <p:nvSpPr>
-          <p:cNvPr id="2" name="Slide Image Placeholder 1"/>
+          <p:cNvPr id="2" name="Slide Image Placeholder 1">
+            <a:extLst>
+              <a:ext uri="{FF2B5EF4-FFF2-40B4-BE49-F238E27FC236}">
+                <a16:creationId xmlns:a16="http://schemas.microsoft.com/office/drawing/2014/main" id="{50B164D4-E4B1-5EE0-6E93-20087E4BB668}"/>
+              </a:ext>
+            </a:extLst>
+          </p:cNvPr>
           <p:cNvSpPr>
             <a:spLocks noGrp="1" noRot="1" noChangeAspect="1"/>
           </p:cNvSpPr>
@@ -720,7 +758,13 @@
       </p:sp>
       <p:sp>
         <p:nvSpPr>
-          <p:cNvPr id="3" name="Notes Placeholder 2"/>
+          <p:cNvPr id="3" name="Notes Placeholder 2">
+            <a:extLst>
+              <a:ext uri="{FF2B5EF4-FFF2-40B4-BE49-F238E27FC236}">
+                <a16:creationId xmlns:a16="http://schemas.microsoft.com/office/drawing/2014/main" id="{B9C96D7C-6C16-DC34-1139-BF5F90E3CBE5}"/>
+              </a:ext>
+            </a:extLst>
+          </p:cNvPr>
           <p:cNvSpPr>
             <a:spLocks noGrp="1"/>
           </p:cNvSpPr>
@@ -739,7 +783,13 @@
       </p:sp>
       <p:sp>
         <p:nvSpPr>
-          <p:cNvPr id="4" name="Slide Number Placeholder 3"/>
+          <p:cNvPr id="4" name="Slide Number Placeholder 3">
+            <a:extLst>
+              <a:ext uri="{FF2B5EF4-FFF2-40B4-BE49-F238E27FC236}">
+                <a16:creationId xmlns:a16="http://schemas.microsoft.com/office/drawing/2014/main" id="{D092D28C-5B1B-A395-A431-DB3F0D309457}"/>
+              </a:ext>
+            </a:extLst>
+          </p:cNvPr>
           <p:cNvSpPr>
             <a:spLocks noGrp="1"/>
           </p:cNvSpPr>
@@ -763,7 +813,7 @@
     </p:spTree>
     <p:extLst>
       <p:ext uri="{BB962C8B-B14F-4D97-AF65-F5344CB8AC3E}">
-        <p14:creationId xmlns:p14="http://schemas.microsoft.com/office/powerpoint/2010/main" val="1024086991"/>
+        <p14:creationId xmlns:p14="http://schemas.microsoft.com/office/powerpoint/2010/main" val="1816460214"/>
       </p:ext>
     </p:extLst>
   </p:cSld>
@@ -1109,6 +1159,90 @@
 </p:notes>
 </file>
 
+<file path=ppt/notesSlides/notesSlide19.xml><?xml version="1.0" encoding="utf-8"?>
+<p:notes xmlns:a="http://schemas.openxmlformats.org/drawingml/2006/main" xmlns:r="http://schemas.openxmlformats.org/officeDocument/2006/relationships" xmlns:p="http://schemas.openxmlformats.org/presentationml/2006/main">
+  <p:cSld>
+    <p:spTree>
+      <p:nvGrpSpPr>
+        <p:cNvPr id="1" name=""/>
+        <p:cNvGrpSpPr/>
+        <p:nvPr/>
+      </p:nvGrpSpPr>
+      <p:grpSpPr>
+        <a:xfrm>
+          <a:off x="0" y="0"/>
+          <a:ext cx="0" cy="0"/>
+          <a:chOff x="0" y="0"/>
+          <a:chExt cx="0" cy="0"/>
+        </a:xfrm>
+      </p:grpSpPr>
+      <p:sp>
+        <p:nvSpPr>
+          <p:cNvPr id="2" name="Slide Image Placeholder 1"/>
+          <p:cNvSpPr>
+            <a:spLocks noGrp="1" noRot="1" noChangeAspect="1"/>
+          </p:cNvSpPr>
+          <p:nvPr>
+            <p:ph type="sldImg"/>
+          </p:nvPr>
+        </p:nvSpPr>
+        <p:spPr/>
+      </p:sp>
+      <p:sp>
+        <p:nvSpPr>
+          <p:cNvPr id="3" name="Notes Placeholder 2"/>
+          <p:cNvSpPr>
+            <a:spLocks noGrp="1"/>
+          </p:cNvSpPr>
+          <p:nvPr>
+            <p:ph type="body" idx="1"/>
+          </p:nvPr>
+        </p:nvSpPr>
+        <p:spPr/>
+        <p:txBody>
+          <a:bodyPr/>
+          <a:lstStyle/>
+          <a:p>
+            <a:endParaRPr lang="en-US" dirty="0"/>
+          </a:p>
+        </p:txBody>
+      </p:sp>
+      <p:sp>
+        <p:nvSpPr>
+          <p:cNvPr id="4" name="Slide Number Placeholder 3"/>
+          <p:cNvSpPr>
+            <a:spLocks noGrp="1"/>
+          </p:cNvSpPr>
+          <p:nvPr>
+            <p:ph type="sldNum" sz="quarter" idx="10"/>
+          </p:nvPr>
+        </p:nvSpPr>
+        <p:spPr/>
+        <p:txBody>
+          <a:bodyPr/>
+          <a:lstStyle/>
+          <a:p>
+            <a:fld id="{F7021451-1387-4CA6-816F-3879F97B5CBC}" type="slidenum">
+              <a:rPr lang="en-US"/>
+              <a:t>19</a:t>
+            </a:fld>
+            <a:endParaRPr lang="en-US"/>
+          </a:p>
+        </p:txBody>
+      </p:sp>
+    </p:spTree>
+    <p:extLst>
+      <p:ext uri="{BB962C8B-B14F-4D97-AF65-F5344CB8AC3E}">
+        <p14:creationId xmlns:p14="http://schemas.microsoft.com/office/powerpoint/2010/main" val="1024086991"/>
+      </p:ext>
+    </p:extLst>
+  </p:cSld>
+  <p:clrMapOvr>
+    <a:masterClrMapping/>
+  </p:clrMapOvr>
+</p:notes>
+</file>
+
 <file path=ppt/notesSlides/notesSlide2.xml><?xml version="1.0" encoding="utf-8"?>
 <p:notes xmlns:a="http://schemas.openxmlformats.org/drawingml/2006/main" xmlns:r="http://schemas.openxmlformats.org/officeDocument/2006/relationships" xmlns:p="http://schemas.openxmlformats.org/presentationml/2006/main">
   <p:cSld>
@@ -1175,6 +1309,90 @@
             <a:fld id="{F7021451-1387-4CA6-816F-3879F97B5CBC}" type="slidenum">
               <a:rPr lang="en-US"/>
               <a:t>2</a:t>
+            </a:fld>
+            <a:endParaRPr lang="en-US"/>
+          </a:p>
+        </p:txBody>
+      </p:sp>
+    </p:spTree>
+    <p:extLst>
+      <p:ext uri="{BB962C8B-B14F-4D97-AF65-F5344CB8AC3E}">
+        <p14:creationId xmlns:p14="http://schemas.microsoft.com/office/powerpoint/2010/main" val="1024086991"/>
+      </p:ext>
+    </p:extLst>
+  </p:cSld>
+  <p:clrMapOvr>
+    <a:masterClrMapping/>
+  </p:clrMapOvr>
+</p:notes>
+</file>
+
+<file path=ppt/notesSlides/notesSlide20.xml><?xml version="1.0" encoding="utf-8"?>
+<p:notes xmlns:a="http://schemas.openxmlformats.org/drawingml/2006/main" xmlns:r="http://schemas.openxmlformats.org/officeDocument/2006/relationships" xmlns:p="http://schemas.openxmlformats.org/presentationml/2006/main">
+  <p:cSld>
+    <p:spTree>
+      <p:nvGrpSpPr>
+        <p:cNvPr id="1" name=""/>
+        <p:cNvGrpSpPr/>
+        <p:nvPr/>
+      </p:nvGrpSpPr>
+      <p:grpSpPr>
+        <a:xfrm>
+          <a:off x="0" y="0"/>
+          <a:ext cx="0" cy="0"/>
+          <a:chOff x="0" y="0"/>
+          <a:chExt cx="0" cy="0"/>
+        </a:xfrm>
+      </p:grpSpPr>
+      <p:sp>
+        <p:nvSpPr>
+          <p:cNvPr id="2" name="Slide Image Placeholder 1"/>
+          <p:cNvSpPr>
+            <a:spLocks noGrp="1" noRot="1" noChangeAspect="1"/>
+          </p:cNvSpPr>
+          <p:nvPr>
+            <p:ph type="sldImg"/>
+          </p:nvPr>
+        </p:nvSpPr>
+        <p:spPr/>
+      </p:sp>
+      <p:sp>
+        <p:nvSpPr>
+          <p:cNvPr id="3" name="Notes Placeholder 2"/>
+          <p:cNvSpPr>
+            <a:spLocks noGrp="1"/>
+          </p:cNvSpPr>
+          <p:nvPr>
+            <p:ph type="body" idx="1"/>
+          </p:nvPr>
+        </p:nvSpPr>
+        <p:spPr/>
+        <p:txBody>
+          <a:bodyPr/>
+          <a:lstStyle/>
+          <a:p>
+            <a:endParaRPr lang="en-US" dirty="0"/>
+          </a:p>
+        </p:txBody>
+      </p:sp>
+      <p:sp>
+        <p:nvSpPr>
+          <p:cNvPr id="4" name="Slide Number Placeholder 3"/>
+          <p:cNvSpPr>
+            <a:spLocks noGrp="1"/>
+          </p:cNvSpPr>
+          <p:nvPr>
+            <p:ph type="sldNum" sz="quarter" idx="10"/>
+          </p:nvPr>
+        </p:nvSpPr>
+        <p:spPr/>
+        <p:txBody>
+          <a:bodyPr/>
+          <a:lstStyle/>
+          <a:p>
+            <a:fld id="{F7021451-1387-4CA6-816F-3879F97B5CBC}" type="slidenum">
+              <a:rPr lang="en-US"/>
+              <a:t>20</a:t>
             </a:fld>
             <a:endParaRPr lang="en-US"/>
           </a:p>
@@ -3747,6 +3965,17 @@
               </a:lnSpc>
             </a:pPr>
             <a:r>
+              <a:rPr lang="ru-RU" sz="1400" dirty="0">
+                <a:solidFill>
+                  <a:srgbClr val="90A4AE"/>
+                </a:solidFill>
+                <a:latin typeface="Quattrocento Sans" pitchFamily="34" charset="0"/>
+                <a:ea typeface="Quattrocento Sans" pitchFamily="34" charset="-122"/>
+                <a:cs typeface="Quattrocento Sans" pitchFamily="34" charset="-120"/>
+              </a:rPr>
+              <a:t>1</a:t>
+            </a:r>
+            <a:r>
               <a:rPr lang="en-US" sz="1400" dirty="0">
                 <a:solidFill>
                   <a:srgbClr val="90A4AE"/>
@@ -3755,7 +3984,18 @@
                 <a:ea typeface="Quattrocento Sans" pitchFamily="34" charset="-122"/>
                 <a:cs typeface="Quattrocento Sans" pitchFamily="34" charset="-120"/>
               </a:rPr>
-              <a:t>09 / 17</a:t>
+              <a:t>0 / </a:t>
+            </a:r>
+            <a:r>
+              <a:rPr lang="ru-RU" sz="1400" dirty="0">
+                <a:solidFill>
+                  <a:srgbClr val="90A4AE"/>
+                </a:solidFill>
+                <a:latin typeface="Quattrocento Sans" pitchFamily="34" charset="0"/>
+                <a:ea typeface="Quattrocento Sans" pitchFamily="34" charset="-122"/>
+                <a:cs typeface="Quattrocento Sans" pitchFamily="34" charset="-120"/>
+              </a:rPr>
+              <a:t>20</a:t>
             </a:r>
             <a:endParaRPr lang="en-US" sz="1600" dirty="0"/>
           </a:p>
@@ -3899,6 +4139,75 @@
           <a:lstStyle/>
           <a:p>
             <a:endParaRPr lang="ru-RU"/>
+          </a:p>
+        </p:txBody>
+      </p:sp>
+      <p:sp>
+        <p:nvSpPr>
+          <p:cNvPr id="3" name="Text 6">
+            <a:extLst>
+              <a:ext uri="{FF2B5EF4-FFF2-40B4-BE49-F238E27FC236}">
+                <a16:creationId xmlns:a16="http://schemas.microsoft.com/office/drawing/2014/main" id="{3B406556-2B48-BD29-8201-12273AEBA9EC}"/>
+              </a:ext>
+            </a:extLst>
+          </p:cNvPr>
+          <p:cNvSpPr/>
+          <p:nvPr/>
+        </p:nvSpPr>
+        <p:spPr>
+          <a:xfrm>
+            <a:off x="14605000" y="8636000"/>
+            <a:ext cx="1016000" cy="304800"/>
+          </a:xfrm>
+          <a:prstGeom prst="rect">
+            <a:avLst/>
+          </a:prstGeom>
+          <a:noFill/>
+          <a:ln/>
+        </p:spPr>
+        <p:txBody>
+          <a:bodyPr wrap="none" lIns="0" tIns="0" rIns="0" bIns="0" rtlCol="0" anchor="ctr"/>
+          <a:lstStyle/>
+          <a:p>
+            <a:pPr algn="r">
+              <a:lnSpc>
+                <a:spcPct val="100000"/>
+              </a:lnSpc>
+            </a:pPr>
+            <a:r>
+              <a:rPr lang="ru-RU" sz="1400" dirty="0">
+                <a:solidFill>
+                  <a:srgbClr val="90A4AE"/>
+                </a:solidFill>
+                <a:latin typeface="Quattrocento Sans" pitchFamily="34" charset="0"/>
+                <a:ea typeface="Quattrocento Sans" pitchFamily="34" charset="-122"/>
+                <a:cs typeface="Quattrocento Sans" pitchFamily="34" charset="-120"/>
+              </a:rPr>
+              <a:t>11</a:t>
+            </a:r>
+            <a:r>
+              <a:rPr lang="en-US" sz="1400" dirty="0">
+                <a:solidFill>
+                  <a:srgbClr val="90A4AE"/>
+                </a:solidFill>
+                <a:latin typeface="Quattrocento Sans" pitchFamily="34" charset="0"/>
+                <a:ea typeface="Quattrocento Sans" pitchFamily="34" charset="-122"/>
+                <a:cs typeface="Quattrocento Sans" pitchFamily="34" charset="-120"/>
+              </a:rPr>
+              <a:t> / </a:t>
+            </a:r>
+            <a:r>
+              <a:rPr lang="ru-RU" sz="1400" dirty="0">
+                <a:solidFill>
+                  <a:srgbClr val="90A4AE"/>
+                </a:solidFill>
+                <a:latin typeface="Quattrocento Sans" pitchFamily="34" charset="0"/>
+                <a:ea typeface="Quattrocento Sans" pitchFamily="34" charset="-122"/>
+                <a:cs typeface="Quattrocento Sans" pitchFamily="34" charset="-120"/>
+              </a:rPr>
+              <a:t>20</a:t>
+            </a:r>
+            <a:endParaRPr lang="en-US" sz="1600" dirty="0"/>
           </a:p>
         </p:txBody>
       </p:sp>
@@ -5918,7 +6227,40 @@
                 <a:ea typeface="Quattrocento Sans" pitchFamily="34" charset="-122"/>
                 <a:cs typeface="Quattrocento Sans" pitchFamily="34" charset="-120"/>
               </a:rPr>
-              <a:t>11 / 17</a:t>
+              <a:t>1</a:t>
+            </a:r>
+            <a:r>
+              <a:rPr lang="ru-RU" sz="1400" dirty="0">
+                <a:solidFill>
+                  <a:srgbClr val="90A4AE"/>
+                </a:solidFill>
+                <a:latin typeface="Quattrocento Sans" pitchFamily="34" charset="0"/>
+                <a:ea typeface="Quattrocento Sans" pitchFamily="34" charset="-122"/>
+                <a:cs typeface="Quattrocento Sans" pitchFamily="34" charset="-120"/>
+              </a:rPr>
+              <a:t>2</a:t>
+            </a:r>
+            <a:r>
+              <a:rPr lang="en-US" sz="1400" dirty="0">
+                <a:solidFill>
+                  <a:srgbClr val="90A4AE"/>
+                </a:solidFill>
+                <a:latin typeface="Quattrocento Sans" pitchFamily="34" charset="0"/>
+                <a:ea typeface="Quattrocento Sans" pitchFamily="34" charset="-122"/>
+                <a:cs typeface="Quattrocento Sans" pitchFamily="34" charset="-120"/>
+              </a:rPr>
+              <a:t> / </a:t>
+            </a:r>
+            <a:r>
+              <a:rPr lang="ru-RU" sz="1400" dirty="0">
+                <a:solidFill>
+                  <a:srgbClr val="90A4AE"/>
+                </a:solidFill>
+                <a:latin typeface="Quattrocento Sans" pitchFamily="34" charset="0"/>
+                <a:ea typeface="Quattrocento Sans" pitchFamily="34" charset="-122"/>
+                <a:cs typeface="Quattrocento Sans" pitchFamily="34" charset="-120"/>
+              </a:rPr>
+              <a:t>20</a:t>
             </a:r>
             <a:endParaRPr lang="en-US" sz="1600" dirty="0"/>
           </a:p>
@@ -5936,6 +6278,559 @@
 </file>
 
 <file path=ppt/slides/slide13.xml><?xml version="1.0" encoding="utf-8"?>
+<p:sld xmlns:a="http://schemas.openxmlformats.org/drawingml/2006/main" xmlns:r="http://schemas.openxmlformats.org/officeDocument/2006/relationships" xmlns:p="http://schemas.openxmlformats.org/presentationml/2006/main">
+  <p:cSld>
+    <p:bg>
+      <p:bgPr>
+        <a:solidFill>
+          <a:srgbClr val="263238"/>
+        </a:solidFill>
+        <a:effectLst/>
+      </p:bgPr>
+    </p:bg>
+    <p:spTree>
+      <p:nvGrpSpPr>
+        <p:cNvPr id="1" name="">
+          <a:extLst>
+            <a:ext uri="{FF2B5EF4-FFF2-40B4-BE49-F238E27FC236}">
+              <a16:creationId xmlns:a16="http://schemas.microsoft.com/office/drawing/2014/main" id="{474FAB20-FC9F-A67A-E89F-43807CC8CA64}"/>
+            </a:ext>
+          </a:extLst>
+        </p:cNvPr>
+        <p:cNvGrpSpPr/>
+        <p:nvPr/>
+      </p:nvGrpSpPr>
+      <p:grpSpPr>
+        <a:xfrm>
+          <a:off x="0" y="0"/>
+          <a:ext cx="0" cy="0"/>
+          <a:chOff x="0" y="0"/>
+          <a:chExt cx="0" cy="0"/>
+        </a:xfrm>
+      </p:grpSpPr>
+      <p:sp>
+        <p:nvSpPr>
+          <p:cNvPr id="2" name="Shape 0">
+            <a:extLst>
+              <a:ext uri="{FF2B5EF4-FFF2-40B4-BE49-F238E27FC236}">
+                <a16:creationId xmlns:a16="http://schemas.microsoft.com/office/drawing/2014/main" id="{CF7F6F64-7E9D-9C1F-8D6F-0F9F719A0AC1}"/>
+              </a:ext>
+            </a:extLst>
+          </p:cNvPr>
+          <p:cNvSpPr/>
+          <p:nvPr/>
+        </p:nvSpPr>
+        <p:spPr>
+          <a:xfrm>
+            <a:off x="0" y="0"/>
+            <a:ext cx="16256000" cy="0"/>
+          </a:xfrm>
+          <a:prstGeom prst="straightConnector1">
+            <a:avLst/>
+          </a:prstGeom>
+          <a:noFill/>
+          <a:ln w="50800">
+            <a:solidFill>
+              <a:srgbClr val="90A4AE"/>
+            </a:solidFill>
+            <a:prstDash val="solid"/>
+            <a:headEnd type="none"/>
+            <a:tailEnd type="none"/>
+          </a:ln>
+        </p:spPr>
+        <p:txBody>
+          <a:bodyPr/>
+          <a:lstStyle/>
+          <a:p>
+            <a:endParaRPr lang="ru-RU"/>
+          </a:p>
+        </p:txBody>
+      </p:sp>
+      <p:sp>
+        <p:nvSpPr>
+          <p:cNvPr id="5" name="Text 3">
+            <a:extLst>
+              <a:ext uri="{FF2B5EF4-FFF2-40B4-BE49-F238E27FC236}">
+                <a16:creationId xmlns:a16="http://schemas.microsoft.com/office/drawing/2014/main" id="{6BE087F8-F215-311A-96B5-4FEC0BF97DE9}"/>
+              </a:ext>
+            </a:extLst>
+          </p:cNvPr>
+          <p:cNvSpPr/>
+          <p:nvPr/>
+        </p:nvSpPr>
+        <p:spPr>
+          <a:xfrm>
+            <a:off x="3048000" y="3937000"/>
+            <a:ext cx="10160000" cy="635000"/>
+          </a:xfrm>
+          <a:prstGeom prst="rect">
+            <a:avLst/>
+          </a:prstGeom>
+          <a:noFill/>
+          <a:ln/>
+        </p:spPr>
+        <p:txBody>
+          <a:bodyPr wrap="none" lIns="0" tIns="0" rIns="0" bIns="0" rtlCol="0" anchor="ctr"/>
+          <a:lstStyle/>
+          <a:p>
+            <a:pPr algn="ctr">
+              <a:lnSpc>
+                <a:spcPct val="100000"/>
+              </a:lnSpc>
+            </a:pPr>
+            <a:r>
+              <a:rPr lang="ru-RU" sz="3600" b="1" dirty="0">
+                <a:solidFill>
+                  <a:srgbClr val="FFFFFF"/>
+                </a:solidFill>
+              </a:rPr>
+              <a:t>Внешний вид сайта</a:t>
+            </a:r>
+            <a:endParaRPr lang="en-US" sz="1600" dirty="0"/>
+          </a:p>
+        </p:txBody>
+      </p:sp>
+      <p:sp>
+        <p:nvSpPr>
+          <p:cNvPr id="7" name="Shape 5">
+            <a:extLst>
+              <a:ext uri="{FF2B5EF4-FFF2-40B4-BE49-F238E27FC236}">
+                <a16:creationId xmlns:a16="http://schemas.microsoft.com/office/drawing/2014/main" id="{49897FBF-C6FA-A278-826A-47846828673B}"/>
+              </a:ext>
+            </a:extLst>
+          </p:cNvPr>
+          <p:cNvSpPr/>
+          <p:nvPr/>
+        </p:nvSpPr>
+        <p:spPr>
+          <a:xfrm>
+            <a:off x="0" y="9093200"/>
+            <a:ext cx="16256000" cy="0"/>
+          </a:xfrm>
+          <a:prstGeom prst="straightConnector1">
+            <a:avLst/>
+          </a:prstGeom>
+          <a:noFill/>
+          <a:ln w="50800">
+            <a:solidFill>
+              <a:srgbClr val="90A4AE"/>
+            </a:solidFill>
+            <a:prstDash val="solid"/>
+            <a:headEnd type="none"/>
+            <a:tailEnd type="none"/>
+          </a:ln>
+        </p:spPr>
+        <p:txBody>
+          <a:bodyPr/>
+          <a:lstStyle/>
+          <a:p>
+            <a:endParaRPr lang="ru-RU"/>
+          </a:p>
+        </p:txBody>
+      </p:sp>
+      <p:sp>
+        <p:nvSpPr>
+          <p:cNvPr id="3" name="Text 6">
+            <a:extLst>
+              <a:ext uri="{FF2B5EF4-FFF2-40B4-BE49-F238E27FC236}">
+                <a16:creationId xmlns:a16="http://schemas.microsoft.com/office/drawing/2014/main" id="{9A8CE315-06A2-9E06-62EE-943AE205F996}"/>
+              </a:ext>
+            </a:extLst>
+          </p:cNvPr>
+          <p:cNvSpPr/>
+          <p:nvPr/>
+        </p:nvSpPr>
+        <p:spPr>
+          <a:xfrm>
+            <a:off x="14605000" y="8636000"/>
+            <a:ext cx="1016000" cy="304800"/>
+          </a:xfrm>
+          <a:prstGeom prst="rect">
+            <a:avLst/>
+          </a:prstGeom>
+          <a:noFill/>
+          <a:ln/>
+        </p:spPr>
+        <p:txBody>
+          <a:bodyPr wrap="none" lIns="0" tIns="0" rIns="0" bIns="0" rtlCol="0" anchor="ctr"/>
+          <a:lstStyle/>
+          <a:p>
+            <a:pPr algn="r">
+              <a:lnSpc>
+                <a:spcPct val="100000"/>
+              </a:lnSpc>
+            </a:pPr>
+            <a:r>
+              <a:rPr lang="ru-RU" sz="1400" dirty="0">
+                <a:solidFill>
+                  <a:srgbClr val="90A4AE"/>
+                </a:solidFill>
+                <a:latin typeface="Quattrocento Sans" pitchFamily="34" charset="0"/>
+                <a:ea typeface="Quattrocento Sans" pitchFamily="34" charset="-122"/>
+                <a:cs typeface="Quattrocento Sans" pitchFamily="34" charset="-120"/>
+              </a:rPr>
+              <a:t>13</a:t>
+            </a:r>
+            <a:r>
+              <a:rPr lang="en-US" sz="1400" dirty="0">
+                <a:solidFill>
+                  <a:srgbClr val="90A4AE"/>
+                </a:solidFill>
+                <a:latin typeface="Quattrocento Sans" pitchFamily="34" charset="0"/>
+                <a:ea typeface="Quattrocento Sans" pitchFamily="34" charset="-122"/>
+                <a:cs typeface="Quattrocento Sans" pitchFamily="34" charset="-120"/>
+              </a:rPr>
+              <a:t> / </a:t>
+            </a:r>
+            <a:r>
+              <a:rPr lang="ru-RU" sz="1400" dirty="0">
+                <a:solidFill>
+                  <a:srgbClr val="90A4AE"/>
+                </a:solidFill>
+                <a:latin typeface="Quattrocento Sans" pitchFamily="34" charset="0"/>
+                <a:ea typeface="Quattrocento Sans" pitchFamily="34" charset="-122"/>
+                <a:cs typeface="Quattrocento Sans" pitchFamily="34" charset="-120"/>
+              </a:rPr>
+              <a:t>20</a:t>
+            </a:r>
+            <a:endParaRPr lang="en-US" sz="1600" dirty="0"/>
+          </a:p>
+        </p:txBody>
+      </p:sp>
+    </p:spTree>
+    <p:extLst>
+      <p:ext uri="{BB962C8B-B14F-4D97-AF65-F5344CB8AC3E}">
+        <p14:creationId xmlns:p14="http://schemas.microsoft.com/office/powerpoint/2010/main" val="3160831346"/>
+      </p:ext>
+    </p:extLst>
+  </p:cSld>
+  <p:clrMapOvr>
+    <a:masterClrMapping/>
+  </p:clrMapOvr>
+  <p:transition>
+    <p:fade/>
+  </p:transition>
+</p:sld>
+</file>
+
+<file path=ppt/slides/slide14.xml><?xml version="1.0" encoding="utf-8"?>
+<p:sld xmlns:a="http://schemas.openxmlformats.org/drawingml/2006/main" xmlns:r="http://schemas.openxmlformats.org/officeDocument/2006/relationships" xmlns:p="http://schemas.openxmlformats.org/presentationml/2006/main">
+  <p:cSld>
+    <p:bg>
+      <p:bgPr>
+        <a:solidFill>
+          <a:srgbClr val="F5F7F8"/>
+        </a:solidFill>
+        <a:effectLst/>
+      </p:bgPr>
+    </p:bg>
+    <p:spTree>
+      <p:nvGrpSpPr>
+        <p:cNvPr id="1" name="">
+          <a:extLst>
+            <a:ext uri="{FF2B5EF4-FFF2-40B4-BE49-F238E27FC236}">
+              <a16:creationId xmlns:a16="http://schemas.microsoft.com/office/drawing/2014/main" id="{E850ED24-F2CC-3684-2921-2D349E942BA8}"/>
+            </a:ext>
+          </a:extLst>
+        </p:cNvPr>
+        <p:cNvGrpSpPr/>
+        <p:nvPr/>
+      </p:nvGrpSpPr>
+      <p:grpSpPr>
+        <a:xfrm>
+          <a:off x="0" y="0"/>
+          <a:ext cx="0" cy="0"/>
+          <a:chOff x="0" y="0"/>
+          <a:chExt cx="0" cy="0"/>
+        </a:xfrm>
+      </p:grpSpPr>
+      <p:sp>
+        <p:nvSpPr>
+          <p:cNvPr id="2" name="Shape 0">
+            <a:extLst>
+              <a:ext uri="{FF2B5EF4-FFF2-40B4-BE49-F238E27FC236}">
+                <a16:creationId xmlns:a16="http://schemas.microsoft.com/office/drawing/2014/main" id="{B0BBB2F3-AC6E-E51A-2731-0AC26DA79A07}"/>
+              </a:ext>
+            </a:extLst>
+          </p:cNvPr>
+          <p:cNvSpPr/>
+          <p:nvPr/>
+        </p:nvSpPr>
+        <p:spPr>
+          <a:xfrm>
+            <a:off x="0" y="0"/>
+            <a:ext cx="16256000" cy="0"/>
+          </a:xfrm>
+          <a:prstGeom prst="straightConnector1">
+            <a:avLst/>
+          </a:prstGeom>
+          <a:noFill/>
+          <a:ln w="50800">
+            <a:solidFill>
+              <a:srgbClr val="455A64"/>
+            </a:solidFill>
+            <a:prstDash val="solid"/>
+            <a:headEnd type="none"/>
+            <a:tailEnd type="none"/>
+          </a:ln>
+        </p:spPr>
+        <p:txBody>
+          <a:bodyPr/>
+          <a:lstStyle/>
+          <a:p>
+            <a:endParaRPr lang="ru-RU"/>
+          </a:p>
+        </p:txBody>
+      </p:sp>
+      <p:sp>
+        <p:nvSpPr>
+          <p:cNvPr id="4" name="Text 2">
+            <a:extLst>
+              <a:ext uri="{FF2B5EF4-FFF2-40B4-BE49-F238E27FC236}">
+                <a16:creationId xmlns:a16="http://schemas.microsoft.com/office/drawing/2014/main" id="{398E6503-A179-2EDF-0A85-51D7FFF1D318}"/>
+              </a:ext>
+            </a:extLst>
+          </p:cNvPr>
+          <p:cNvSpPr/>
+          <p:nvPr/>
+        </p:nvSpPr>
+        <p:spPr>
+          <a:xfrm>
+            <a:off x="1016000" y="635000"/>
+            <a:ext cx="10160000" cy="444500"/>
+          </a:xfrm>
+          <a:prstGeom prst="rect">
+            <a:avLst/>
+          </a:prstGeom>
+          <a:noFill/>
+          <a:ln/>
+        </p:spPr>
+        <p:txBody>
+          <a:bodyPr wrap="none" lIns="0" tIns="0" rIns="0" bIns="0" rtlCol="0" anchor="ctr"/>
+          <a:lstStyle/>
+          <a:p>
+            <a:pPr>
+              <a:lnSpc>
+                <a:spcPct val="100000"/>
+              </a:lnSpc>
+            </a:pPr>
+            <a:r>
+              <a:rPr lang="ru-RU" sz="2800" b="1" dirty="0">
+                <a:solidFill>
+                  <a:srgbClr val="455A64"/>
+                </a:solidFill>
+                <a:latin typeface="QuattrocentoSans" pitchFamily="34" charset="0"/>
+                <a:ea typeface="QuattrocentoSans" pitchFamily="34" charset="-122"/>
+                <a:cs typeface="QuattrocentoSans" pitchFamily="34" charset="-120"/>
+              </a:rPr>
+              <a:t>Внешний вид сайта</a:t>
+            </a:r>
+          </a:p>
+        </p:txBody>
+      </p:sp>
+      <p:sp>
+        <p:nvSpPr>
+          <p:cNvPr id="5" name="Shape 3">
+            <a:extLst>
+              <a:ext uri="{FF2B5EF4-FFF2-40B4-BE49-F238E27FC236}">
+                <a16:creationId xmlns:a16="http://schemas.microsoft.com/office/drawing/2014/main" id="{9BC2A275-6946-C9B6-FCE4-76D2EDCE6256}"/>
+              </a:ext>
+            </a:extLst>
+          </p:cNvPr>
+          <p:cNvSpPr/>
+          <p:nvPr/>
+        </p:nvSpPr>
+        <p:spPr>
+          <a:xfrm>
+            <a:off x="1016000" y="1143000"/>
+            <a:ext cx="14224000" cy="0"/>
+          </a:xfrm>
+          <a:prstGeom prst="straightConnector1">
+            <a:avLst/>
+          </a:prstGeom>
+          <a:noFill/>
+          <a:ln w="12700">
+            <a:solidFill>
+              <a:srgbClr val="CFD8DC"/>
+            </a:solidFill>
+            <a:prstDash val="solid"/>
+            <a:headEnd type="none"/>
+            <a:tailEnd type="none"/>
+          </a:ln>
+        </p:spPr>
+        <p:txBody>
+          <a:bodyPr/>
+          <a:lstStyle/>
+          <a:p>
+            <a:endParaRPr lang="ru-RU"/>
+          </a:p>
+        </p:txBody>
+      </p:sp>
+      <p:sp>
+        <p:nvSpPr>
+          <p:cNvPr id="17" name="Shape 14">
+            <a:extLst>
+              <a:ext uri="{FF2B5EF4-FFF2-40B4-BE49-F238E27FC236}">
+                <a16:creationId xmlns:a16="http://schemas.microsoft.com/office/drawing/2014/main" id="{53E4658D-CCC8-6A50-D99A-23C81DB2B47C}"/>
+              </a:ext>
+            </a:extLst>
+          </p:cNvPr>
+          <p:cNvSpPr/>
+          <p:nvPr/>
+        </p:nvSpPr>
+        <p:spPr>
+          <a:xfrm>
+            <a:off x="0" y="9093200"/>
+            <a:ext cx="16256000" cy="0"/>
+          </a:xfrm>
+          <a:prstGeom prst="straightConnector1">
+            <a:avLst/>
+          </a:prstGeom>
+          <a:noFill/>
+          <a:ln w="50800">
+            <a:solidFill>
+              <a:srgbClr val="455A64"/>
+            </a:solidFill>
+            <a:prstDash val="solid"/>
+            <a:headEnd type="none"/>
+            <a:tailEnd type="none"/>
+          </a:ln>
+        </p:spPr>
+        <p:txBody>
+          <a:bodyPr/>
+          <a:lstStyle/>
+          <a:p>
+            <a:endParaRPr lang="ru-RU"/>
+          </a:p>
+        </p:txBody>
+      </p:sp>
+      <p:sp>
+        <p:nvSpPr>
+          <p:cNvPr id="18" name="Text 15">
+            <a:extLst>
+              <a:ext uri="{FF2B5EF4-FFF2-40B4-BE49-F238E27FC236}">
+                <a16:creationId xmlns:a16="http://schemas.microsoft.com/office/drawing/2014/main" id="{F0B52FC5-7A55-2D6C-FEEA-A69B5AAF531C}"/>
+              </a:ext>
+            </a:extLst>
+          </p:cNvPr>
+          <p:cNvSpPr/>
+          <p:nvPr/>
+        </p:nvSpPr>
+        <p:spPr>
+          <a:xfrm>
+            <a:off x="14605000" y="8636000"/>
+            <a:ext cx="1016000" cy="304800"/>
+          </a:xfrm>
+          <a:prstGeom prst="rect">
+            <a:avLst/>
+          </a:prstGeom>
+          <a:noFill/>
+          <a:ln/>
+        </p:spPr>
+        <p:txBody>
+          <a:bodyPr wrap="none" lIns="0" tIns="0" rIns="0" bIns="0" rtlCol="0" anchor="ctr"/>
+          <a:lstStyle/>
+          <a:p>
+            <a:pPr algn="r">
+              <a:lnSpc>
+                <a:spcPct val="100000"/>
+              </a:lnSpc>
+            </a:pPr>
+            <a:r>
+              <a:rPr lang="en-US" sz="1400" dirty="0">
+                <a:solidFill>
+                  <a:srgbClr val="90A4AE"/>
+                </a:solidFill>
+                <a:latin typeface="Quattrocento Sans" pitchFamily="34" charset="0"/>
+                <a:ea typeface="Quattrocento Sans" pitchFamily="34" charset="-122"/>
+                <a:cs typeface="Quattrocento Sans" pitchFamily="34" charset="-120"/>
+              </a:rPr>
+              <a:t>1</a:t>
+            </a:r>
+            <a:r>
+              <a:rPr lang="ru-RU" sz="1400" dirty="0">
+                <a:solidFill>
+                  <a:srgbClr val="90A4AE"/>
+                </a:solidFill>
+                <a:latin typeface="Quattrocento Sans" pitchFamily="34" charset="0"/>
+                <a:ea typeface="Quattrocento Sans" pitchFamily="34" charset="-122"/>
+                <a:cs typeface="Quattrocento Sans" pitchFamily="34" charset="-120"/>
+              </a:rPr>
+              <a:t>4</a:t>
+            </a:r>
+            <a:r>
+              <a:rPr lang="en-US" sz="1400" dirty="0">
+                <a:solidFill>
+                  <a:srgbClr val="90A4AE"/>
+                </a:solidFill>
+                <a:latin typeface="Quattrocento Sans" pitchFamily="34" charset="0"/>
+                <a:ea typeface="Quattrocento Sans" pitchFamily="34" charset="-122"/>
+                <a:cs typeface="Quattrocento Sans" pitchFamily="34" charset="-120"/>
+              </a:rPr>
+              <a:t> / </a:t>
+            </a:r>
+            <a:r>
+              <a:rPr lang="ru-RU" sz="1400" dirty="0">
+                <a:solidFill>
+                  <a:srgbClr val="90A4AE"/>
+                </a:solidFill>
+                <a:latin typeface="Quattrocento Sans" pitchFamily="34" charset="0"/>
+                <a:ea typeface="Quattrocento Sans" pitchFamily="34" charset="-122"/>
+                <a:cs typeface="Quattrocento Sans" pitchFamily="34" charset="-120"/>
+              </a:rPr>
+              <a:t>20</a:t>
+            </a:r>
+            <a:endParaRPr lang="en-US" sz="1600" dirty="0"/>
+          </a:p>
+        </p:txBody>
+      </p:sp>
+      <p:pic>
+        <p:nvPicPr>
+          <p:cNvPr id="19" name="Рисунок 18">
+            <a:extLst>
+              <a:ext uri="{FF2B5EF4-FFF2-40B4-BE49-F238E27FC236}">
+                <a16:creationId xmlns:a16="http://schemas.microsoft.com/office/drawing/2014/main" id="{9E2A27D8-8F71-3DDE-7697-54B4CD706C8A}"/>
+              </a:ext>
+            </a:extLst>
+          </p:cNvPr>
+          <p:cNvPicPr>
+            <a:picLocks noChangeAspect="1"/>
+          </p:cNvPicPr>
+          <p:nvPr/>
+        </p:nvPicPr>
+        <p:blipFill>
+          <a:blip r:embed="rId3"/>
+          <a:stretch>
+            <a:fillRect/>
+          </a:stretch>
+        </p:blipFill>
+        <p:spPr>
+          <a:xfrm>
+            <a:off x="1696334" y="1295401"/>
+            <a:ext cx="12863332" cy="7235624"/>
+          </a:xfrm>
+          <a:prstGeom prst="rect">
+            <a:avLst/>
+          </a:prstGeom>
+        </p:spPr>
+      </p:pic>
+    </p:spTree>
+    <p:extLst>
+      <p:ext uri="{BB962C8B-B14F-4D97-AF65-F5344CB8AC3E}">
+        <p14:creationId xmlns:p14="http://schemas.microsoft.com/office/powerpoint/2010/main" val="3611107197"/>
+      </p:ext>
+    </p:extLst>
+  </p:cSld>
+  <p:clrMapOvr>
+    <a:masterClrMapping/>
+  </p:clrMapOvr>
+  <p:transition>
+    <p:fade/>
+  </p:transition>
+</p:sld>
+</file>
+
+<file path=ppt/slides/slide15.xml><?xml version="1.0" encoding="utf-8"?>
 <p:sld xmlns:a="http://schemas.openxmlformats.org/drawingml/2006/main" xmlns:r="http://schemas.openxmlformats.org/officeDocument/2006/relationships" xmlns:p="http://schemas.openxmlformats.org/presentationml/2006/main">
   <p:cSld name="Slide 12">
     <p:bg>
@@ -6065,6 +6960,75 @@
           </a:p>
         </p:txBody>
       </p:sp>
+      <p:sp>
+        <p:nvSpPr>
+          <p:cNvPr id="3" name="Text 6">
+            <a:extLst>
+              <a:ext uri="{FF2B5EF4-FFF2-40B4-BE49-F238E27FC236}">
+                <a16:creationId xmlns:a16="http://schemas.microsoft.com/office/drawing/2014/main" id="{11D0F1EA-60B1-CC41-3063-9BC39F587C43}"/>
+              </a:ext>
+            </a:extLst>
+          </p:cNvPr>
+          <p:cNvSpPr/>
+          <p:nvPr/>
+        </p:nvSpPr>
+        <p:spPr>
+          <a:xfrm>
+            <a:off x="14605000" y="8636000"/>
+            <a:ext cx="1016000" cy="304800"/>
+          </a:xfrm>
+          <a:prstGeom prst="rect">
+            <a:avLst/>
+          </a:prstGeom>
+          <a:noFill/>
+          <a:ln/>
+        </p:spPr>
+        <p:txBody>
+          <a:bodyPr wrap="none" lIns="0" tIns="0" rIns="0" bIns="0" rtlCol="0" anchor="ctr"/>
+          <a:lstStyle/>
+          <a:p>
+            <a:pPr algn="r">
+              <a:lnSpc>
+                <a:spcPct val="100000"/>
+              </a:lnSpc>
+            </a:pPr>
+            <a:r>
+              <a:rPr lang="ru-RU" sz="1400" dirty="0">
+                <a:solidFill>
+                  <a:srgbClr val="90A4AE"/>
+                </a:solidFill>
+                <a:latin typeface="Quattrocento Sans" pitchFamily="34" charset="0"/>
+                <a:ea typeface="Quattrocento Sans" pitchFamily="34" charset="-122"/>
+                <a:cs typeface="Quattrocento Sans" pitchFamily="34" charset="-120"/>
+              </a:rPr>
+              <a:t>15</a:t>
+            </a:r>
+            <a:r>
+              <a:rPr lang="en-US" sz="1400" dirty="0">
+                <a:solidFill>
+                  <a:srgbClr val="90A4AE"/>
+                </a:solidFill>
+                <a:latin typeface="Quattrocento Sans" pitchFamily="34" charset="0"/>
+                <a:ea typeface="Quattrocento Sans" pitchFamily="34" charset="-122"/>
+                <a:cs typeface="Quattrocento Sans" pitchFamily="34" charset="-120"/>
+              </a:rPr>
+              <a:t> / </a:t>
+            </a:r>
+            <a:r>
+              <a:rPr lang="ru-RU" sz="1400" dirty="0">
+                <a:solidFill>
+                  <a:srgbClr val="90A4AE"/>
+                </a:solidFill>
+                <a:latin typeface="Quattrocento Sans" pitchFamily="34" charset="0"/>
+                <a:ea typeface="Quattrocento Sans" pitchFamily="34" charset="-122"/>
+                <a:cs typeface="Quattrocento Sans" pitchFamily="34" charset="-120"/>
+              </a:rPr>
+              <a:t>20</a:t>
+            </a:r>
+            <a:endParaRPr lang="en-US" sz="1600" dirty="0"/>
+          </a:p>
+        </p:txBody>
+      </p:sp>
     </p:spTree>
   </p:cSld>
   <p:clrMapOvr>
@@ -6076,7 +7040,7 @@
 </p:sld>
 </file>
 
-<file path=ppt/slides/slide14.xml><?xml version="1.0" encoding="utf-8"?>
+<file path=ppt/slides/slide16.xml><?xml version="1.0" encoding="utf-8"?>
 <p:sld xmlns:a="http://schemas.openxmlformats.org/drawingml/2006/main" xmlns:r="http://schemas.openxmlformats.org/officeDocument/2006/relationships" xmlns:p="http://schemas.openxmlformats.org/presentationml/2006/main">
   <p:cSld name="Slide 13">
     <p:bg>
@@ -6504,7 +7468,40 @@
                 <a:ea typeface="Quattrocento Sans" pitchFamily="34" charset="-122"/>
                 <a:cs typeface="Quattrocento Sans" pitchFamily="34" charset="-120"/>
               </a:rPr>
-              <a:t>13 / 17</a:t>
+              <a:t>1</a:t>
+            </a:r>
+            <a:r>
+              <a:rPr lang="ru-RU" sz="1400" dirty="0">
+                <a:solidFill>
+                  <a:srgbClr val="90A4AE"/>
+                </a:solidFill>
+                <a:latin typeface="Quattrocento Sans" pitchFamily="34" charset="0"/>
+                <a:ea typeface="Quattrocento Sans" pitchFamily="34" charset="-122"/>
+                <a:cs typeface="Quattrocento Sans" pitchFamily="34" charset="-120"/>
+              </a:rPr>
+              <a:t>6</a:t>
+            </a:r>
+            <a:r>
+              <a:rPr lang="en-US" sz="1400" dirty="0">
+                <a:solidFill>
+                  <a:srgbClr val="90A4AE"/>
+                </a:solidFill>
+                <a:latin typeface="Quattrocento Sans" pitchFamily="34" charset="0"/>
+                <a:ea typeface="Quattrocento Sans" pitchFamily="34" charset="-122"/>
+                <a:cs typeface="Quattrocento Sans" pitchFamily="34" charset="-120"/>
+              </a:rPr>
+              <a:t> / </a:t>
+            </a:r>
+            <a:r>
+              <a:rPr lang="ru-RU" sz="1400" dirty="0">
+                <a:solidFill>
+                  <a:srgbClr val="90A4AE"/>
+                </a:solidFill>
+                <a:latin typeface="Quattrocento Sans" pitchFamily="34" charset="0"/>
+                <a:ea typeface="Quattrocento Sans" pitchFamily="34" charset="-122"/>
+                <a:cs typeface="Quattrocento Sans" pitchFamily="34" charset="-120"/>
+              </a:rPr>
+              <a:t>20</a:t>
             </a:r>
             <a:endParaRPr lang="en-US" sz="1600" dirty="0"/>
           </a:p>
@@ -6521,7 +7518,7 @@
 </p:sld>
 </file>
 
-<file path=ppt/slides/slide15.xml><?xml version="1.0" encoding="utf-8"?>
+<file path=ppt/slides/slide17.xml><?xml version="1.0" encoding="utf-8"?>
 <p:sld xmlns:a="http://schemas.openxmlformats.org/drawingml/2006/main" xmlns:r="http://schemas.openxmlformats.org/officeDocument/2006/relationships" xmlns:p="http://schemas.openxmlformats.org/presentationml/2006/main">
   <p:cSld name="Slide 14">
     <p:bg>
@@ -6926,7 +7923,40 @@
                 <a:ea typeface="Quattrocento Sans" pitchFamily="34" charset="-122"/>
                 <a:cs typeface="Quattrocento Sans" pitchFamily="34" charset="-120"/>
               </a:rPr>
-              <a:t>14 / 17</a:t>
+              <a:t>1</a:t>
+            </a:r>
+            <a:r>
+              <a:rPr lang="ru-RU" sz="1400" dirty="0">
+                <a:solidFill>
+                  <a:srgbClr val="90A4AE"/>
+                </a:solidFill>
+                <a:latin typeface="Quattrocento Sans" pitchFamily="34" charset="0"/>
+                <a:ea typeface="Quattrocento Sans" pitchFamily="34" charset="-122"/>
+                <a:cs typeface="Quattrocento Sans" pitchFamily="34" charset="-120"/>
+              </a:rPr>
+              <a:t>7</a:t>
+            </a:r>
+            <a:r>
+              <a:rPr lang="en-US" sz="1400" dirty="0">
+                <a:solidFill>
+                  <a:srgbClr val="90A4AE"/>
+                </a:solidFill>
+                <a:latin typeface="Quattrocento Sans" pitchFamily="34" charset="0"/>
+                <a:ea typeface="Quattrocento Sans" pitchFamily="34" charset="-122"/>
+                <a:cs typeface="Quattrocento Sans" pitchFamily="34" charset="-120"/>
+              </a:rPr>
+              <a:t> / </a:t>
+            </a:r>
+            <a:r>
+              <a:rPr lang="ru-RU" sz="1400" dirty="0">
+                <a:solidFill>
+                  <a:srgbClr val="90A4AE"/>
+                </a:solidFill>
+                <a:latin typeface="Quattrocento Sans" pitchFamily="34" charset="0"/>
+                <a:ea typeface="Quattrocento Sans" pitchFamily="34" charset="-122"/>
+                <a:cs typeface="Quattrocento Sans" pitchFamily="34" charset="-120"/>
+              </a:rPr>
+              <a:t>20</a:t>
             </a:r>
             <a:endParaRPr lang="en-US" sz="1600" dirty="0"/>
           </a:p>
@@ -6973,7 +8003,7 @@
 </p:sld>
 </file>
 
-<file path=ppt/slides/slide16.xml><?xml version="1.0" encoding="utf-8"?>
+<file path=ppt/slides/slide18.xml><?xml version="1.0" encoding="utf-8"?>
 <p:sld xmlns:a="http://schemas.openxmlformats.org/drawingml/2006/main" xmlns:r="http://schemas.openxmlformats.org/officeDocument/2006/relationships" xmlns:p="http://schemas.openxmlformats.org/presentationml/2006/main">
   <p:cSld name="Slide 15">
     <p:bg>
@@ -7239,7 +8269,40 @@
                 <a:ea typeface="Quattrocento Sans" pitchFamily="34" charset="-122"/>
                 <a:cs typeface="Quattrocento Sans" pitchFamily="34" charset="-120"/>
               </a:rPr>
-              <a:t>15 / 17</a:t>
+              <a:t>1</a:t>
+            </a:r>
+            <a:r>
+              <a:rPr lang="ru-RU" sz="1400" dirty="0">
+                <a:solidFill>
+                  <a:srgbClr val="90A4AE"/>
+                </a:solidFill>
+                <a:latin typeface="Quattrocento Sans" pitchFamily="34" charset="0"/>
+                <a:ea typeface="Quattrocento Sans" pitchFamily="34" charset="-122"/>
+                <a:cs typeface="Quattrocento Sans" pitchFamily="34" charset="-120"/>
+              </a:rPr>
+              <a:t>8</a:t>
+            </a:r>
+            <a:r>
+              <a:rPr lang="en-US" sz="1400" dirty="0">
+                <a:solidFill>
+                  <a:srgbClr val="90A4AE"/>
+                </a:solidFill>
+                <a:latin typeface="Quattrocento Sans" pitchFamily="34" charset="0"/>
+                <a:ea typeface="Quattrocento Sans" pitchFamily="34" charset="-122"/>
+                <a:cs typeface="Quattrocento Sans" pitchFamily="34" charset="-120"/>
+              </a:rPr>
+              <a:t> / </a:t>
+            </a:r>
+            <a:r>
+              <a:rPr lang="ru-RU" sz="1400" dirty="0">
+                <a:solidFill>
+                  <a:srgbClr val="90A4AE"/>
+                </a:solidFill>
+                <a:latin typeface="Quattrocento Sans" pitchFamily="34" charset="0"/>
+                <a:ea typeface="Quattrocento Sans" pitchFamily="34" charset="-122"/>
+                <a:cs typeface="Quattrocento Sans" pitchFamily="34" charset="-120"/>
+              </a:rPr>
+              <a:t>20</a:t>
             </a:r>
             <a:endParaRPr lang="en-US" sz="1600" dirty="0"/>
           </a:p>
@@ -7256,7 +8319,7 @@
 </p:sld>
 </file>
 
-<file path=ppt/slides/slide17.xml><?xml version="1.0" encoding="utf-8"?>
+<file path=ppt/slides/slide19.xml><?xml version="1.0" encoding="utf-8"?>
 <p:sld xmlns:a="http://schemas.openxmlformats.org/drawingml/2006/main" xmlns:r="http://schemas.openxmlformats.org/officeDocument/2006/relationships" xmlns:p="http://schemas.openxmlformats.org/presentationml/2006/main">
   <p:cSld name="Slide 16">
     <p:bg>
@@ -8199,115 +9262,19 @@
                 <a:ea typeface="Quattrocento Sans" pitchFamily="34" charset="-122"/>
                 <a:cs typeface="Quattrocento Sans" pitchFamily="34" charset="-120"/>
               </a:rPr>
-              <a:t>16 / 17</a:t>
-            </a:r>
-            <a:endParaRPr lang="en-US" sz="1600" dirty="0"/>
-          </a:p>
-        </p:txBody>
-      </p:sp>
-    </p:spTree>
-  </p:cSld>
-  <p:clrMapOvr>
-    <a:masterClrMapping/>
-  </p:clrMapOvr>
-  <p:transition>
-    <p:fade/>
-  </p:transition>
-</p:sld>
-</file>
-
-<file path=ppt/slides/slide18.xml><?xml version="1.0" encoding="utf-8"?>
-<p:sld xmlns:a="http://schemas.openxmlformats.org/drawingml/2006/main" xmlns:r="http://schemas.openxmlformats.org/officeDocument/2006/relationships" xmlns:p="http://schemas.openxmlformats.org/presentationml/2006/main">
-  <p:cSld name="Slide 17">
-    <p:bg>
-      <p:bgPr>
-        <a:solidFill>
-          <a:srgbClr val="263238"/>
-        </a:solidFill>
-        <a:effectLst/>
-      </p:bgPr>
-    </p:bg>
-    <p:spTree>
-      <p:nvGrpSpPr>
-        <p:cNvPr id="1" name=""/>
-        <p:cNvGrpSpPr/>
-        <p:nvPr/>
-      </p:nvGrpSpPr>
-      <p:grpSpPr>
-        <a:xfrm>
-          <a:off x="0" y="0"/>
-          <a:ext cx="0" cy="0"/>
-          <a:chOff x="0" y="0"/>
-          <a:chExt cx="0" cy="0"/>
-        </a:xfrm>
-      </p:grpSpPr>
-      <p:sp>
-        <p:nvSpPr>
-          <p:cNvPr id="3" name="Text 1"/>
-          <p:cNvSpPr/>
-          <p:nvPr/>
-        </p:nvSpPr>
-        <p:spPr>
-          <a:xfrm>
-            <a:off x="3048000" y="4222750"/>
-            <a:ext cx="10160000" cy="698500"/>
-          </a:xfrm>
-          <a:prstGeom prst="rect">
-            <a:avLst/>
-          </a:prstGeom>
-          <a:noFill/>
-          <a:ln/>
-        </p:spPr>
-        <p:txBody>
-          <a:bodyPr wrap="none" lIns="0" tIns="0" rIns="0" bIns="0" rtlCol="0" anchor="ctr"/>
-          <a:lstStyle/>
-          <a:p>
-            <a:pPr algn="ctr">
-              <a:lnSpc>
-                <a:spcPct val="100000"/>
-              </a:lnSpc>
-            </a:pPr>
-            <a:r>
-              <a:rPr lang="en-US" sz="4200" b="1" dirty="0">
-                <a:solidFill>
-                  <a:srgbClr val="FFFFFF"/>
-                </a:solidFill>
-                <a:latin typeface="Quattrocento Sans" pitchFamily="34" charset="0"/>
-                <a:ea typeface="Quattrocento Sans" pitchFamily="34" charset="-122"/>
-                <a:cs typeface="Quattrocento Sans" pitchFamily="34" charset="-120"/>
-              </a:rPr>
-              <a:t>Спасибо за внимание</a:t>
-            </a:r>
-            <a:endParaRPr lang="en-US" sz="1600" dirty="0"/>
-          </a:p>
-        </p:txBody>
-      </p:sp>
-      <p:sp>
-        <p:nvSpPr>
-          <p:cNvPr id="8" name="Text 6"/>
-          <p:cNvSpPr/>
-          <p:nvPr/>
-        </p:nvSpPr>
-        <p:spPr>
-          <a:xfrm>
-            <a:off x="14605000" y="8636000"/>
-            <a:ext cx="1016000" cy="304800"/>
-          </a:xfrm>
-          <a:prstGeom prst="rect">
-            <a:avLst/>
-          </a:prstGeom>
-          <a:noFill/>
-          <a:ln/>
-        </p:spPr>
-        <p:txBody>
-          <a:bodyPr wrap="none" lIns="0" tIns="0" rIns="0" bIns="0" rtlCol="0" anchor="ctr"/>
-          <a:lstStyle/>
-          <a:p>
-            <a:pPr algn="r">
-              <a:lnSpc>
-                <a:spcPct val="100000"/>
-              </a:lnSpc>
-            </a:pPr>
+              <a:t>1</a:t>
+            </a:r>
+            <a:r>
+              <a:rPr lang="ru-RU" sz="1400" dirty="0">
+                <a:solidFill>
+                  <a:srgbClr val="90A4AE"/>
+                </a:solidFill>
+                <a:latin typeface="Quattrocento Sans" pitchFamily="34" charset="0"/>
+                <a:ea typeface="Quattrocento Sans" pitchFamily="34" charset="-122"/>
+                <a:cs typeface="Quattrocento Sans" pitchFamily="34" charset="-120"/>
+              </a:rPr>
+              <a:t>9</a:t>
+            </a:r>
             <a:r>
               <a:rPr lang="en-US" sz="1400" dirty="0">
                 <a:solidFill>
@@ -8317,7 +9284,18 @@
                 <a:ea typeface="Quattrocento Sans" pitchFamily="34" charset="-122"/>
                 <a:cs typeface="Quattrocento Sans" pitchFamily="34" charset="-120"/>
               </a:rPr>
-              <a:t>17 / 17</a:t>
+              <a:t> / </a:t>
+            </a:r>
+            <a:r>
+              <a:rPr lang="ru-RU" sz="1400" dirty="0">
+                <a:solidFill>
+                  <a:srgbClr val="90A4AE"/>
+                </a:solidFill>
+                <a:latin typeface="Quattrocento Sans" pitchFamily="34" charset="0"/>
+                <a:ea typeface="Quattrocento Sans" pitchFamily="34" charset="-122"/>
+                <a:cs typeface="Quattrocento Sans" pitchFamily="34" charset="-120"/>
+              </a:rPr>
+              <a:t>20</a:t>
             </a:r>
             <a:endParaRPr lang="en-US" sz="1600" dirty="0"/>
           </a:p>
@@ -9069,7 +10047,158 @@
                 <a:ea typeface="Quattrocento Sans" pitchFamily="34" charset="-122"/>
                 <a:cs typeface="Quattrocento Sans" pitchFamily="34" charset="-120"/>
               </a:rPr>
-              <a:t>02 / 17</a:t>
+              <a:t>02 / </a:t>
+            </a:r>
+            <a:r>
+              <a:rPr lang="ru-RU" sz="1400" dirty="0">
+                <a:solidFill>
+                  <a:srgbClr val="90A4AE"/>
+                </a:solidFill>
+                <a:latin typeface="Quattrocento Sans" pitchFamily="34" charset="0"/>
+                <a:ea typeface="Quattrocento Sans" pitchFamily="34" charset="-122"/>
+                <a:cs typeface="Quattrocento Sans" pitchFamily="34" charset="-120"/>
+              </a:rPr>
+              <a:t>20</a:t>
+            </a:r>
+            <a:endParaRPr lang="en-US" sz="1600" dirty="0"/>
+          </a:p>
+        </p:txBody>
+      </p:sp>
+    </p:spTree>
+  </p:cSld>
+  <p:clrMapOvr>
+    <a:masterClrMapping/>
+  </p:clrMapOvr>
+  <p:transition>
+    <p:fade/>
+  </p:transition>
+</p:sld>
+</file>
+
+<file path=ppt/slides/slide20.xml><?xml version="1.0" encoding="utf-8"?>
+<p:sld xmlns:a="http://schemas.openxmlformats.org/drawingml/2006/main" xmlns:r="http://schemas.openxmlformats.org/officeDocument/2006/relationships" xmlns:p="http://schemas.openxmlformats.org/presentationml/2006/main">
+  <p:cSld name="Slide 17">
+    <p:bg>
+      <p:bgPr>
+        <a:solidFill>
+          <a:srgbClr val="263238"/>
+        </a:solidFill>
+        <a:effectLst/>
+      </p:bgPr>
+    </p:bg>
+    <p:spTree>
+      <p:nvGrpSpPr>
+        <p:cNvPr id="1" name=""/>
+        <p:cNvGrpSpPr/>
+        <p:nvPr/>
+      </p:nvGrpSpPr>
+      <p:grpSpPr>
+        <a:xfrm>
+          <a:off x="0" y="0"/>
+          <a:ext cx="0" cy="0"/>
+          <a:chOff x="0" y="0"/>
+          <a:chExt cx="0" cy="0"/>
+        </a:xfrm>
+      </p:grpSpPr>
+      <p:sp>
+        <p:nvSpPr>
+          <p:cNvPr id="3" name="Text 1"/>
+          <p:cNvSpPr/>
+          <p:nvPr/>
+        </p:nvSpPr>
+        <p:spPr>
+          <a:xfrm>
+            <a:off x="3048000" y="4222750"/>
+            <a:ext cx="10160000" cy="698500"/>
+          </a:xfrm>
+          <a:prstGeom prst="rect">
+            <a:avLst/>
+          </a:prstGeom>
+          <a:noFill/>
+          <a:ln/>
+        </p:spPr>
+        <p:txBody>
+          <a:bodyPr wrap="none" lIns="0" tIns="0" rIns="0" bIns="0" rtlCol="0" anchor="ctr"/>
+          <a:lstStyle/>
+          <a:p>
+            <a:pPr algn="ctr">
+              <a:lnSpc>
+                <a:spcPct val="100000"/>
+              </a:lnSpc>
+            </a:pPr>
+            <a:r>
+              <a:rPr lang="en-US" sz="4200" b="1" dirty="0">
+                <a:solidFill>
+                  <a:srgbClr val="FFFFFF"/>
+                </a:solidFill>
+                <a:latin typeface="Quattrocento Sans" pitchFamily="34" charset="0"/>
+                <a:ea typeface="Quattrocento Sans" pitchFamily="34" charset="-122"/>
+                <a:cs typeface="Quattrocento Sans" pitchFamily="34" charset="-120"/>
+              </a:rPr>
+              <a:t>Спасибо за внимание</a:t>
+            </a:r>
+            <a:endParaRPr lang="en-US" sz="1600" dirty="0"/>
+          </a:p>
+        </p:txBody>
+      </p:sp>
+      <p:sp>
+        <p:nvSpPr>
+          <p:cNvPr id="8" name="Text 6"/>
+          <p:cNvSpPr/>
+          <p:nvPr/>
+        </p:nvSpPr>
+        <p:spPr>
+          <a:xfrm>
+            <a:off x="14605000" y="8636000"/>
+            <a:ext cx="1016000" cy="304800"/>
+          </a:xfrm>
+          <a:prstGeom prst="rect">
+            <a:avLst/>
+          </a:prstGeom>
+          <a:noFill/>
+          <a:ln/>
+        </p:spPr>
+        <p:txBody>
+          <a:bodyPr wrap="none" lIns="0" tIns="0" rIns="0" bIns="0" rtlCol="0" anchor="ctr"/>
+          <a:lstStyle/>
+          <a:p>
+            <a:pPr algn="r">
+              <a:lnSpc>
+                <a:spcPct val="100000"/>
+              </a:lnSpc>
+            </a:pPr>
+            <a:r>
+              <a:rPr lang="ru-RU" sz="1400" dirty="0">
+                <a:solidFill>
+                  <a:srgbClr val="90A4AE"/>
+                </a:solidFill>
+                <a:latin typeface="Quattrocento Sans" pitchFamily="34" charset="0"/>
+                <a:ea typeface="Quattrocento Sans" pitchFamily="34" charset="-122"/>
+                <a:cs typeface="Quattrocento Sans" pitchFamily="34" charset="-120"/>
+              </a:rPr>
+              <a:t>20</a:t>
+            </a:r>
+            <a:r>
+              <a:rPr lang="en-US" sz="1400" dirty="0">
+                <a:solidFill>
+                  <a:srgbClr val="90A4AE"/>
+                </a:solidFill>
+                <a:latin typeface="Quattrocento Sans" pitchFamily="34" charset="0"/>
+                <a:ea typeface="Quattrocento Sans" pitchFamily="34" charset="-122"/>
+                <a:cs typeface="Quattrocento Sans" pitchFamily="34" charset="-120"/>
+              </a:rPr>
+              <a:t> / </a:t>
+            </a:r>
+            <a:r>
+              <a:rPr lang="ru-RU" sz="1400" dirty="0">
+                <a:solidFill>
+                  <a:srgbClr val="90A4AE"/>
+                </a:solidFill>
+                <a:latin typeface="Quattrocento Sans" pitchFamily="34" charset="0"/>
+                <a:ea typeface="Quattrocento Sans" pitchFamily="34" charset="-122"/>
+                <a:cs typeface="Quattrocento Sans" pitchFamily="34" charset="-120"/>
+              </a:rPr>
+              <a:t>20</a:t>
             </a:r>
             <a:endParaRPr lang="en-US" sz="1600" dirty="0"/>
           </a:p>
@@ -9216,6 +10345,75 @@
           </a:p>
         </p:txBody>
       </p:sp>
+      <p:sp>
+        <p:nvSpPr>
+          <p:cNvPr id="3" name="Text 6">
+            <a:extLst>
+              <a:ext uri="{FF2B5EF4-FFF2-40B4-BE49-F238E27FC236}">
+                <a16:creationId xmlns:a16="http://schemas.microsoft.com/office/drawing/2014/main" id="{78E0AF69-3F76-9BE0-72FC-3F47C4977DCC}"/>
+              </a:ext>
+            </a:extLst>
+          </p:cNvPr>
+          <p:cNvSpPr/>
+          <p:nvPr/>
+        </p:nvSpPr>
+        <p:spPr>
+          <a:xfrm>
+            <a:off x="14605000" y="8636000"/>
+            <a:ext cx="1016000" cy="304800"/>
+          </a:xfrm>
+          <a:prstGeom prst="rect">
+            <a:avLst/>
+          </a:prstGeom>
+          <a:noFill/>
+          <a:ln/>
+        </p:spPr>
+        <p:txBody>
+          <a:bodyPr wrap="none" lIns="0" tIns="0" rIns="0" bIns="0" rtlCol="0" anchor="ctr"/>
+          <a:lstStyle/>
+          <a:p>
+            <a:pPr algn="r">
+              <a:lnSpc>
+                <a:spcPct val="100000"/>
+              </a:lnSpc>
+            </a:pPr>
+            <a:r>
+              <a:rPr lang="ru-RU" sz="1400" dirty="0">
+                <a:solidFill>
+                  <a:srgbClr val="90A4AE"/>
+                </a:solidFill>
+                <a:latin typeface="Quattrocento Sans" pitchFamily="34" charset="0"/>
+                <a:ea typeface="Quattrocento Sans" pitchFamily="34" charset="-122"/>
+                <a:cs typeface="Quattrocento Sans" pitchFamily="34" charset="-120"/>
+              </a:rPr>
+              <a:t>3</a:t>
+            </a:r>
+            <a:r>
+              <a:rPr lang="en-US" sz="1400" dirty="0">
+                <a:solidFill>
+                  <a:srgbClr val="90A4AE"/>
+                </a:solidFill>
+                <a:latin typeface="Quattrocento Sans" pitchFamily="34" charset="0"/>
+                <a:ea typeface="Quattrocento Sans" pitchFamily="34" charset="-122"/>
+                <a:cs typeface="Quattrocento Sans" pitchFamily="34" charset="-120"/>
+              </a:rPr>
+              <a:t> / </a:t>
+            </a:r>
+            <a:r>
+              <a:rPr lang="ru-RU" sz="1400" dirty="0">
+                <a:solidFill>
+                  <a:srgbClr val="90A4AE"/>
+                </a:solidFill>
+                <a:latin typeface="Quattrocento Sans" pitchFamily="34" charset="0"/>
+                <a:ea typeface="Quattrocento Sans" pitchFamily="34" charset="-122"/>
+                <a:cs typeface="Quattrocento Sans" pitchFamily="34" charset="-120"/>
+              </a:rPr>
+              <a:t>20</a:t>
+            </a:r>
+            <a:endParaRPr lang="en-US" sz="1600" dirty="0"/>
+          </a:p>
+        </p:txBody>
+      </p:sp>
     </p:spTree>
   </p:cSld>
   <p:clrMapOvr>
@@ -9913,7 +11111,18 @@
                 <a:ea typeface="Quattrocento Sans" pitchFamily="34" charset="-122"/>
                 <a:cs typeface="Quattrocento Sans" pitchFamily="34" charset="-120"/>
               </a:rPr>
-              <a:t>04 / 17</a:t>
+              <a:t>04 /</a:t>
+            </a:r>
+            <a:r>
+              <a:rPr lang="ru-RU" sz="1400" dirty="0">
+                <a:solidFill>
+                  <a:srgbClr val="90A4AE"/>
+                </a:solidFill>
+                <a:latin typeface="Quattrocento Sans" pitchFamily="34" charset="0"/>
+                <a:ea typeface="Quattrocento Sans" pitchFamily="34" charset="-122"/>
+                <a:cs typeface="Quattrocento Sans" pitchFamily="34" charset="-120"/>
+              </a:rPr>
+              <a:t> 20</a:t>
             </a:r>
             <a:endParaRPr lang="en-US" sz="1600" dirty="0"/>
           </a:p>
@@ -10060,6 +11269,75 @@
           </a:p>
         </p:txBody>
       </p:sp>
+      <p:sp>
+        <p:nvSpPr>
+          <p:cNvPr id="3" name="Text 6">
+            <a:extLst>
+              <a:ext uri="{FF2B5EF4-FFF2-40B4-BE49-F238E27FC236}">
+                <a16:creationId xmlns:a16="http://schemas.microsoft.com/office/drawing/2014/main" id="{E73BBC23-6E37-A47A-AF92-04C991C6D620}"/>
+              </a:ext>
+            </a:extLst>
+          </p:cNvPr>
+          <p:cNvSpPr/>
+          <p:nvPr/>
+        </p:nvSpPr>
+        <p:spPr>
+          <a:xfrm>
+            <a:off x="14605000" y="8636000"/>
+            <a:ext cx="1016000" cy="304800"/>
+          </a:xfrm>
+          <a:prstGeom prst="rect">
+            <a:avLst/>
+          </a:prstGeom>
+          <a:noFill/>
+          <a:ln/>
+        </p:spPr>
+        <p:txBody>
+          <a:bodyPr wrap="none" lIns="0" tIns="0" rIns="0" bIns="0" rtlCol="0" anchor="ctr"/>
+          <a:lstStyle/>
+          <a:p>
+            <a:pPr algn="r">
+              <a:lnSpc>
+                <a:spcPct val="100000"/>
+              </a:lnSpc>
+            </a:pPr>
+            <a:r>
+              <a:rPr lang="ru-RU" sz="1400" dirty="0">
+                <a:solidFill>
+                  <a:srgbClr val="90A4AE"/>
+                </a:solidFill>
+                <a:latin typeface="Quattrocento Sans" pitchFamily="34" charset="0"/>
+                <a:ea typeface="Quattrocento Sans" pitchFamily="34" charset="-122"/>
+                <a:cs typeface="Quattrocento Sans" pitchFamily="34" charset="-120"/>
+              </a:rPr>
+              <a:t>5</a:t>
+            </a:r>
+            <a:r>
+              <a:rPr lang="en-US" sz="1400" dirty="0">
+                <a:solidFill>
+                  <a:srgbClr val="90A4AE"/>
+                </a:solidFill>
+                <a:latin typeface="Quattrocento Sans" pitchFamily="34" charset="0"/>
+                <a:ea typeface="Quattrocento Sans" pitchFamily="34" charset="-122"/>
+                <a:cs typeface="Quattrocento Sans" pitchFamily="34" charset="-120"/>
+              </a:rPr>
+              <a:t> / </a:t>
+            </a:r>
+            <a:r>
+              <a:rPr lang="ru-RU" sz="1400" dirty="0">
+                <a:solidFill>
+                  <a:srgbClr val="90A4AE"/>
+                </a:solidFill>
+                <a:latin typeface="Quattrocento Sans" pitchFamily="34" charset="0"/>
+                <a:ea typeface="Quattrocento Sans" pitchFamily="34" charset="-122"/>
+                <a:cs typeface="Quattrocento Sans" pitchFamily="34" charset="-120"/>
+              </a:rPr>
+              <a:t>20</a:t>
+            </a:r>
+            <a:endParaRPr lang="en-US" sz="1600" dirty="0"/>
+          </a:p>
+        </p:txBody>
+      </p:sp>
     </p:spTree>
   </p:cSld>
   <p:clrMapOvr>
@@ -10833,7 +12111,18 @@
                 <a:ea typeface="Quattrocento Sans" pitchFamily="34" charset="-122"/>
                 <a:cs typeface="Quattrocento Sans" pitchFamily="34" charset="-120"/>
               </a:rPr>
-              <a:t>06 / 17</a:t>
+              <a:t>06 / </a:t>
+            </a:r>
+            <a:r>
+              <a:rPr lang="ru-RU" sz="1400" dirty="0">
+                <a:solidFill>
+                  <a:srgbClr val="90A4AE"/>
+                </a:solidFill>
+                <a:latin typeface="Quattrocento Sans" pitchFamily="34" charset="0"/>
+                <a:ea typeface="Quattrocento Sans" pitchFamily="34" charset="-122"/>
+                <a:cs typeface="Quattrocento Sans" pitchFamily="34" charset="-120"/>
+              </a:rPr>
+              <a:t>20</a:t>
             </a:r>
             <a:endParaRPr lang="en-US" sz="1600" dirty="0"/>
           </a:p>
@@ -10980,6 +12269,75 @@
           </a:p>
         </p:txBody>
       </p:sp>
+      <p:sp>
+        <p:nvSpPr>
+          <p:cNvPr id="3" name="Text 6">
+            <a:extLst>
+              <a:ext uri="{FF2B5EF4-FFF2-40B4-BE49-F238E27FC236}">
+                <a16:creationId xmlns:a16="http://schemas.microsoft.com/office/drawing/2014/main" id="{CEEA9877-82B8-44F9-85B5-10808C416FC1}"/>
+              </a:ext>
+            </a:extLst>
+          </p:cNvPr>
+          <p:cNvSpPr/>
+          <p:nvPr/>
+        </p:nvSpPr>
+        <p:spPr>
+          <a:xfrm>
+            <a:off x="14605000" y="8636000"/>
+            <a:ext cx="1016000" cy="304800"/>
+          </a:xfrm>
+          <a:prstGeom prst="rect">
+            <a:avLst/>
+          </a:prstGeom>
+          <a:noFill/>
+          <a:ln/>
+        </p:spPr>
+        <p:txBody>
+          <a:bodyPr wrap="none" lIns="0" tIns="0" rIns="0" bIns="0" rtlCol="0" anchor="ctr"/>
+          <a:lstStyle/>
+          <a:p>
+            <a:pPr algn="r">
+              <a:lnSpc>
+                <a:spcPct val="100000"/>
+              </a:lnSpc>
+            </a:pPr>
+            <a:r>
+              <a:rPr lang="ru-RU" sz="1400" dirty="0">
+                <a:solidFill>
+                  <a:srgbClr val="90A4AE"/>
+                </a:solidFill>
+                <a:latin typeface="Quattrocento Sans" pitchFamily="34" charset="0"/>
+                <a:ea typeface="Quattrocento Sans" pitchFamily="34" charset="-122"/>
+                <a:cs typeface="Quattrocento Sans" pitchFamily="34" charset="-120"/>
+              </a:rPr>
+              <a:t>7</a:t>
+            </a:r>
+            <a:r>
+              <a:rPr lang="en-US" sz="1400" dirty="0">
+                <a:solidFill>
+                  <a:srgbClr val="90A4AE"/>
+                </a:solidFill>
+                <a:latin typeface="Quattrocento Sans" pitchFamily="34" charset="0"/>
+                <a:ea typeface="Quattrocento Sans" pitchFamily="34" charset="-122"/>
+                <a:cs typeface="Quattrocento Sans" pitchFamily="34" charset="-120"/>
+              </a:rPr>
+              <a:t> / </a:t>
+            </a:r>
+            <a:r>
+              <a:rPr lang="ru-RU" sz="1400" dirty="0">
+                <a:solidFill>
+                  <a:srgbClr val="90A4AE"/>
+                </a:solidFill>
+                <a:latin typeface="Quattrocento Sans" pitchFamily="34" charset="0"/>
+                <a:ea typeface="Quattrocento Sans" pitchFamily="34" charset="-122"/>
+                <a:cs typeface="Quattrocento Sans" pitchFamily="34" charset="-120"/>
+              </a:rPr>
+              <a:t>20</a:t>
+            </a:r>
+            <a:endParaRPr lang="en-US" sz="1600" dirty="0"/>
+          </a:p>
+        </p:txBody>
+      </p:sp>
     </p:spTree>
   </p:cSld>
   <p:clrMapOvr>
@@ -11627,7 +12985,18 @@
                 <a:ea typeface="Quattrocento Sans" pitchFamily="34" charset="-122"/>
                 <a:cs typeface="Quattrocento Sans" pitchFamily="34" charset="-120"/>
               </a:rPr>
-              <a:t>08 / 17</a:t>
+              <a:t>08 / </a:t>
+            </a:r>
+            <a:r>
+              <a:rPr lang="ru-RU" sz="1400" dirty="0">
+                <a:solidFill>
+                  <a:srgbClr val="90A4AE"/>
+                </a:solidFill>
+                <a:latin typeface="Quattrocento Sans" pitchFamily="34" charset="0"/>
+                <a:ea typeface="Quattrocento Sans" pitchFamily="34" charset="-122"/>
+                <a:cs typeface="Quattrocento Sans" pitchFamily="34" charset="-120"/>
+              </a:rPr>
+              <a:t>20</a:t>
             </a:r>
             <a:endParaRPr lang="en-US" sz="1600" dirty="0"/>
           </a:p>
@@ -12387,7 +13756,40 @@
                 <a:ea typeface="Quattrocento Sans" pitchFamily="34" charset="-122"/>
                 <a:cs typeface="Quattrocento Sans" pitchFamily="34" charset="-120"/>
               </a:rPr>
-              <a:t>08 / 17</a:t>
+              <a:t>0</a:t>
+            </a:r>
+            <a:r>
+              <a:rPr lang="ru-RU" sz="1400" dirty="0">
+                <a:solidFill>
+                  <a:srgbClr val="90A4AE"/>
+                </a:solidFill>
+                <a:latin typeface="Quattrocento Sans" pitchFamily="34" charset="0"/>
+                <a:ea typeface="Quattrocento Sans" pitchFamily="34" charset="-122"/>
+                <a:cs typeface="Quattrocento Sans" pitchFamily="34" charset="-120"/>
+              </a:rPr>
+              <a:t>9</a:t>
+            </a:r>
+            <a:r>
+              <a:rPr lang="en-US" sz="1400" dirty="0">
+                <a:solidFill>
+                  <a:srgbClr val="90A4AE"/>
+                </a:solidFill>
+                <a:latin typeface="Quattrocento Sans" pitchFamily="34" charset="0"/>
+                <a:ea typeface="Quattrocento Sans" pitchFamily="34" charset="-122"/>
+                <a:cs typeface="Quattrocento Sans" pitchFamily="34" charset="-120"/>
+              </a:rPr>
+              <a:t> / </a:t>
+            </a:r>
+            <a:r>
+              <a:rPr lang="ru-RU" sz="1400" dirty="0">
+                <a:solidFill>
+                  <a:srgbClr val="90A4AE"/>
+                </a:solidFill>
+                <a:latin typeface="Quattrocento Sans" pitchFamily="34" charset="0"/>
+                <a:ea typeface="Quattrocento Sans" pitchFamily="34" charset="-122"/>
+                <a:cs typeface="Quattrocento Sans" pitchFamily="34" charset="-120"/>
+              </a:rPr>
+              <a:t>20</a:t>
             </a:r>
             <a:endParaRPr lang="en-US" sz="1600" dirty="0"/>
           </a:p>
